--- a/备选资产/结构图/分层结论陈述-001/example.pptx
+++ b/备选资产/结构图/分层结论陈述-001/example.pptx
@@ -2,13 +2,13 @@
 <file path=ppt/presentation.xml><?xml version="1.0" encoding="utf-8"?>
 <p:presentation xmlns:p="http://schemas.openxmlformats.org/presentationml/2006/main">
   <p:sldMasterIdLst>
-    <p:sldMasterId xmlns:r="http://schemas.openxmlformats.org/officeDocument/2006/relationships" id="2147483648" r:id="Ree766a92ef6a4b03"/>
+    <p:sldMasterId xmlns:r="http://schemas.openxmlformats.org/officeDocument/2006/relationships" id="2147483648" r:id="Raca948f5f66e42b8"/>
   </p:sldMasterIdLst>
   <p:notesMasterIdLst>
-    <p:notesMasterId xmlns:r="http://schemas.openxmlformats.org/officeDocument/2006/relationships" r:id="Rcf2edec442b44764"/>
+    <p:notesMasterId xmlns:r="http://schemas.openxmlformats.org/officeDocument/2006/relationships" r:id="R42e4ed2ec6ea433c"/>
   </p:notesMasterIdLst>
   <p:sldIdLst>
-    <p:sldId xmlns:r="http://schemas.openxmlformats.org/officeDocument/2006/relationships" id="256" r:id="R7e0d6e6024b44932"/>
+    <p:sldId xmlns:r="http://schemas.openxmlformats.org/officeDocument/2006/relationships" id="256" r:id="R05a259e4c1bf49fb"/>
   </p:sldIdLst>
   <p:sldSz cx="12192000" cy="6858000"/>
   <p:notesSz cx="6858000" cy="9144000"/>
@@ -506,7 +506,7 @@
   </p:cSld>
   <p:clrMap bg1="lt1" tx1="dk1" bg2="lt2" tx2="dk2" accent1="accent1" accent2="accent2" accent3="accent3" accent4="accent4" accent5="accent5" accent6="accent6" hlink="hlink" folHlink="folHlink"/>
   <p:sldLayoutIdLst>
-    <p:sldLayoutId xmlns:r="http://schemas.openxmlformats.org/officeDocument/2006/relationships" id="2147483649" r:id="R7d06183512d54c00"/>
+    <p:sldLayoutId xmlns:r="http://schemas.openxmlformats.org/officeDocument/2006/relationships" id="2147483649" r:id="Rc9e53c3d02fd4d57"/>
   </p:sldLayoutIdLst>
   <p:txStyles>
     <p:titleStyle>
@@ -1057,7 +1057,7 @@
           <p:cNvPr id="12" name="">
             <a:extLst xmlns:a="http://schemas.openxmlformats.org/drawingml/2006/main">
               <a:ext uri="{FF2B5EF4-FFF2-40B4-BE49-F238E27FC236}">
-                <a16:creationId xmlns:a16="http://schemas.microsoft.com/office/drawing/2014/main" id="{BE060DD8-CB8F-4098-B7FC-5AE6E06C2C5A}"/>
+                <a16:creationId xmlns:a16="http://schemas.microsoft.com/office/drawing/2014/main" id="{41415396-3EC5-49AF-804F-ACB0F2426777}"/>
               </a:ext>
             </a:extLst>
           </p:cNvPr>
@@ -1115,7 +1115,7 @@
           <p:cNvPr id="2" name="">
             <a:extLst xmlns:a="http://schemas.openxmlformats.org/drawingml/2006/main">
               <a:ext uri="{FF2B5EF4-FFF2-40B4-BE49-F238E27FC236}">
-                <a16:creationId xmlns:a16="http://schemas.microsoft.com/office/drawing/2014/main" id="{FE9C894F-8357-406A-BB63-E49B20509DC3}"/>
+                <a16:creationId xmlns:a16="http://schemas.microsoft.com/office/drawing/2014/main" id="{3A8CFE20-E4FD-43EA-A157-657958CB679B}"/>
               </a:ext>
             </a:extLst>
           </p:cNvPr>
@@ -1170,10 +1170,10 @@
       </p:sp>
       <p:sp>
         <p:nvSpPr>
-          <p:cNvPr id="3" name="">
+          <p:cNvPr id="3" name="PPAGENT_QA|parent=conclusion-section-0|domains=conclusion-sections">
             <a:extLst xmlns:a="http://schemas.openxmlformats.org/drawingml/2006/main">
               <a:ext uri="{FF2B5EF4-FFF2-40B4-BE49-F238E27FC236}">
-                <a16:creationId xmlns:a16="http://schemas.microsoft.com/office/drawing/2014/main" id="{293EFF15-3549-4E86-80C6-AD4A3FD45EF8}"/>
+                <a16:creationId xmlns:a16="http://schemas.microsoft.com/office/drawing/2014/main" id="{92455B0D-C682-4ACE-B002-98B728CE12E3}"/>
               </a:ext>
             </a:extLst>
           </p:cNvPr>
@@ -1185,25 +1185,27 @@
         <p:spPr>
           <a:xfrm xmlns:a="http://schemas.openxmlformats.org/drawingml/2006/main">
             <a:off x="647700" y="1352550"/>
-            <a:ext cx="10896600" cy="1473200"/>
+            <a:ext cx="10896600" cy="1485900"/>
           </a:xfrm>
           <a:prstGeom xmlns:a="http://schemas.openxmlformats.org/drawingml/2006/main" prst="roundRect">
             <a:avLst>
-              <a:gd name="adj" fmla="val 7759"/>
+              <a:gd name="adj" fmla="val 7692"/>
             </a:avLst>
           </a:prstGeom>
           <a:solidFill xmlns:a="http://schemas.openxmlformats.org/drawingml/2006/main">
-            <a:srgbClr val="E6F0F8"/>
-          </a:solidFill>
-          <a:ln xmlns:a="http://schemas.openxmlformats.org/drawingml/2006/main" w="0">
-            <a:noFill/>
+            <a:srgbClr val="E5F0FA"/>
+          </a:solidFill>
+          <a:ln xmlns:a="http://schemas.openxmlformats.org/drawingml/2006/main" w="9525">
+            <a:solidFill>
+              <a:srgbClr val="FFFFFF"/>
+            </a:solidFill>
             <a:prstDash val="solid"/>
           </a:ln>
         </p:spPr>
         <p:style>
           <a:lnRef xmlns:a="http://schemas.openxmlformats.org/drawingml/2006/main" idx="0"/>
           <a:fillRef xmlns:a="http://schemas.openxmlformats.org/drawingml/2006/main" idx="0"/>
-          <a:effectRef xmlns:a="http://schemas.openxmlformats.org/drawingml/2006/main" idx="4"/>
+          <a:effectRef xmlns:a="http://schemas.openxmlformats.org/drawingml/2006/main" idx="6"/>
           <a:fontRef xmlns:a="http://schemas.openxmlformats.org/drawingml/2006/main" idx="major"/>
         </p:style>
       </p:sp>
@@ -1212,7 +1214,7 @@
           <p:cNvPr id="4" name="">
             <a:extLst xmlns:a="http://schemas.openxmlformats.org/drawingml/2006/main">
               <a:ext uri="{FF2B5EF4-FFF2-40B4-BE49-F238E27FC236}">
-                <a16:creationId xmlns:a16="http://schemas.microsoft.com/office/drawing/2014/main" id="{A080D0EE-0CA9-482B-BB13-BC142A324F96}"/>
+                <a16:creationId xmlns:a16="http://schemas.microsoft.com/office/drawing/2014/main" id="{421AA607-4B7E-4FDC-8525-C41034A73246}"/>
               </a:ext>
             </a:extLst>
           </p:cNvPr>
@@ -1224,12 +1226,10 @@
         <p:spPr>
           <a:xfrm xmlns:a="http://schemas.openxmlformats.org/drawingml/2006/main">
             <a:off x="647700" y="1352550"/>
-            <a:ext cx="1809750" cy="1473200"/>
+            <a:ext cx="2000250" cy="1485900"/>
           </a:xfrm>
-          <a:prstGeom xmlns:a="http://schemas.openxmlformats.org/drawingml/2006/main" prst="roundRect">
-            <a:avLst>
-              <a:gd name="adj" fmla="val 7759"/>
-            </a:avLst>
+          <a:prstGeom xmlns:a="http://schemas.openxmlformats.org/drawingml/2006/main" prst="rightArrow">
+            <a:avLst/>
           </a:prstGeom>
           <a:solidFill xmlns:a="http://schemas.openxmlformats.org/drawingml/2006/main">
             <a:srgbClr val="174A75"/>
@@ -1240,7 +1240,7 @@
           </a:ln>
         </p:spPr>
         <p:txBody>
-          <a:bodyPr xmlns:a="http://schemas.openxmlformats.org/drawingml/2006/main" lIns="114300" tIns="76200" rIns="114300" bIns="76200" anchor="ctr">
+          <a:bodyPr xmlns:a="http://schemas.openxmlformats.org/drawingml/2006/main" lIns="114300" tIns="38100" rIns="266700" bIns="38100" anchor="ctr">
             <a:normAutofit fontScale="100000"/>
           </a:bodyPr>
           <a:lstStyle xmlns:a="http://schemas.openxmlformats.org/drawingml/2006/main"/>
@@ -1274,7 +1274,7 @@
           <p:cNvPr id="5" name="">
             <a:extLst xmlns:a="http://schemas.openxmlformats.org/drawingml/2006/main">
               <a:ext uri="{FF2B5EF4-FFF2-40B4-BE49-F238E27FC236}">
-                <a16:creationId xmlns:a16="http://schemas.microsoft.com/office/drawing/2014/main" id="{D6EE0FEE-E482-432F-982A-61B56D41D90D}"/>
+                <a16:creationId xmlns:a16="http://schemas.microsoft.com/office/drawing/2014/main" id="{7B6D08C3-9A49-4508-8CB8-4311134A3542}"/>
               </a:ext>
             </a:extLst>
           </p:cNvPr>
@@ -1285,8 +1285,8 @@
         </p:nvSpPr>
         <p:spPr>
           <a:xfrm xmlns:a="http://schemas.openxmlformats.org/drawingml/2006/main">
-            <a:off x="2724150" y="1485900"/>
-            <a:ext cx="8439150" cy="1206500"/>
+            <a:off x="2895600" y="1466850"/>
+            <a:ext cx="8210550" cy="1257300"/>
           </a:xfrm>
           <a:prstGeom xmlns:a="http://schemas.openxmlformats.org/drawingml/2006/main" prst="rect">
             <a:avLst/>
@@ -1298,7 +1298,7 @@
           </a:ln>
         </p:spPr>
         <p:txBody>
-          <a:bodyPr xmlns:a="http://schemas.openxmlformats.org/drawingml/2006/main" lIns="0" tIns="0" rIns="0" bIns="0" anchor="t">
+          <a:bodyPr xmlns:a="http://schemas.openxmlformats.org/drawingml/2006/main" lIns="0" tIns="0" rIns="0" bIns="0" anchor="ctr">
             <a:normAutofit fontScale="100000"/>
           </a:bodyPr>
           <a:lstStyle xmlns:a="http://schemas.openxmlformats.org/drawingml/2006/main"/>
@@ -1375,10 +1375,10 @@
       </p:sp>
       <p:sp>
         <p:nvSpPr>
-          <p:cNvPr id="6" name="">
+          <p:cNvPr id="6" name="PPAGENT_QA|parent=conclusion-section-1|domains=conclusion-sections">
             <a:extLst xmlns:a="http://schemas.openxmlformats.org/drawingml/2006/main">
               <a:ext uri="{FF2B5EF4-FFF2-40B4-BE49-F238E27FC236}">
-                <a16:creationId xmlns:a16="http://schemas.microsoft.com/office/drawing/2014/main" id="{7E397152-5DD1-4F04-BE40-34DEF7F3747E}"/>
+                <a16:creationId xmlns:a16="http://schemas.microsoft.com/office/drawing/2014/main" id="{B3B8EA8C-7C91-4E47-9A6F-8832455E9B40}"/>
               </a:ext>
             </a:extLst>
           </p:cNvPr>
@@ -1389,26 +1389,28 @@
         </p:nvSpPr>
         <p:spPr>
           <a:xfrm xmlns:a="http://schemas.openxmlformats.org/drawingml/2006/main">
-            <a:off x="647700" y="2997200"/>
-            <a:ext cx="10896600" cy="1473200"/>
+            <a:off x="647700" y="2990850"/>
+            <a:ext cx="10896600" cy="1485900"/>
           </a:xfrm>
           <a:prstGeom xmlns:a="http://schemas.openxmlformats.org/drawingml/2006/main" prst="roundRect">
             <a:avLst>
-              <a:gd name="adj" fmla="val 7759"/>
+              <a:gd name="adj" fmla="val 7692"/>
             </a:avLst>
           </a:prstGeom>
           <a:solidFill xmlns:a="http://schemas.openxmlformats.org/drawingml/2006/main">
-            <a:srgbClr val="F0ECE8"/>
-          </a:solidFill>
-          <a:ln xmlns:a="http://schemas.openxmlformats.org/drawingml/2006/main" w="0">
-            <a:noFill/>
+            <a:srgbClr val="EEEAE6"/>
+          </a:solidFill>
+          <a:ln xmlns:a="http://schemas.openxmlformats.org/drawingml/2006/main" w="9525">
+            <a:solidFill>
+              <a:srgbClr val="FFFFFF"/>
+            </a:solidFill>
             <a:prstDash val="solid"/>
           </a:ln>
         </p:spPr>
         <p:style>
           <a:lnRef xmlns:a="http://schemas.openxmlformats.org/drawingml/2006/main" idx="0"/>
           <a:fillRef xmlns:a="http://schemas.openxmlformats.org/drawingml/2006/main" idx="0"/>
-          <a:effectRef xmlns:a="http://schemas.openxmlformats.org/drawingml/2006/main" idx="4"/>
+          <a:effectRef xmlns:a="http://schemas.openxmlformats.org/drawingml/2006/main" idx="6"/>
           <a:fontRef xmlns:a="http://schemas.openxmlformats.org/drawingml/2006/main" idx="major"/>
         </p:style>
       </p:sp>
@@ -1417,7 +1419,7 @@
           <p:cNvPr id="7" name="">
             <a:extLst xmlns:a="http://schemas.openxmlformats.org/drawingml/2006/main">
               <a:ext uri="{FF2B5EF4-FFF2-40B4-BE49-F238E27FC236}">
-                <a16:creationId xmlns:a16="http://schemas.microsoft.com/office/drawing/2014/main" id="{6D9B62D3-61BB-4B9F-B842-247E1CCA814D}"/>
+                <a16:creationId xmlns:a16="http://schemas.microsoft.com/office/drawing/2014/main" id="{6AA47F3B-6C19-4F4C-BCEC-4A2DF928C966}"/>
               </a:ext>
             </a:extLst>
           </p:cNvPr>
@@ -1428,16 +1430,14 @@
         </p:nvSpPr>
         <p:spPr>
           <a:xfrm xmlns:a="http://schemas.openxmlformats.org/drawingml/2006/main">
-            <a:off x="647700" y="2997200"/>
-            <a:ext cx="1809750" cy="1473200"/>
+            <a:off x="647700" y="2990850"/>
+            <a:ext cx="2000250" cy="1485900"/>
           </a:xfrm>
-          <a:prstGeom xmlns:a="http://schemas.openxmlformats.org/drawingml/2006/main" prst="roundRect">
-            <a:avLst>
-              <a:gd name="adj" fmla="val 7759"/>
-            </a:avLst>
+          <a:prstGeom xmlns:a="http://schemas.openxmlformats.org/drawingml/2006/main" prst="rightArrow">
+            <a:avLst/>
           </a:prstGeom>
           <a:solidFill xmlns:a="http://schemas.openxmlformats.org/drawingml/2006/main">
-            <a:srgbClr val="9A8B80"/>
+            <a:srgbClr val="8A8078"/>
           </a:solidFill>
           <a:ln xmlns:a="http://schemas.openxmlformats.org/drawingml/2006/main" w="0">
             <a:noFill/>
@@ -1445,7 +1445,7 @@
           </a:ln>
         </p:spPr>
         <p:txBody>
-          <a:bodyPr xmlns:a="http://schemas.openxmlformats.org/drawingml/2006/main" lIns="114300" tIns="76200" rIns="114300" bIns="76200" anchor="ctr">
+          <a:bodyPr xmlns:a="http://schemas.openxmlformats.org/drawingml/2006/main" lIns="114300" tIns="38100" rIns="266700" bIns="38100" anchor="ctr">
             <a:normAutofit fontScale="100000"/>
           </a:bodyPr>
           <a:lstStyle xmlns:a="http://schemas.openxmlformats.org/drawingml/2006/main"/>
@@ -1479,7 +1479,7 @@
           <p:cNvPr id="8" name="">
             <a:extLst xmlns:a="http://schemas.openxmlformats.org/drawingml/2006/main">
               <a:ext uri="{FF2B5EF4-FFF2-40B4-BE49-F238E27FC236}">
-                <a16:creationId xmlns:a16="http://schemas.microsoft.com/office/drawing/2014/main" id="{5C2DD72C-474F-46FE-B997-DE1938ACD403}"/>
+                <a16:creationId xmlns:a16="http://schemas.microsoft.com/office/drawing/2014/main" id="{2D6437D0-FDC6-4FF3-BEE6-2F4BFE5E26D7}"/>
               </a:ext>
             </a:extLst>
           </p:cNvPr>
@@ -1490,8 +1490,8 @@
         </p:nvSpPr>
         <p:spPr>
           <a:xfrm xmlns:a="http://schemas.openxmlformats.org/drawingml/2006/main">
-            <a:off x="2724150" y="3130550"/>
-            <a:ext cx="8439150" cy="1206500"/>
+            <a:off x="2895600" y="3105150"/>
+            <a:ext cx="8210550" cy="1257300"/>
           </a:xfrm>
           <a:prstGeom xmlns:a="http://schemas.openxmlformats.org/drawingml/2006/main" prst="rect">
             <a:avLst/>
@@ -1503,7 +1503,7 @@
           </a:ln>
         </p:spPr>
         <p:txBody>
-          <a:bodyPr xmlns:a="http://schemas.openxmlformats.org/drawingml/2006/main" lIns="0" tIns="0" rIns="0" bIns="0" anchor="t">
+          <a:bodyPr xmlns:a="http://schemas.openxmlformats.org/drawingml/2006/main" lIns="0" tIns="0" rIns="0" bIns="0" anchor="ctr">
             <a:normAutofit fontScale="100000"/>
           </a:bodyPr>
           <a:lstStyle xmlns:a="http://schemas.openxmlformats.org/drawingml/2006/main"/>
@@ -1580,10 +1580,10 @@
       </p:sp>
       <p:sp>
         <p:nvSpPr>
-          <p:cNvPr id="9" name="">
+          <p:cNvPr id="9" name="PPAGENT_QA|parent=conclusion-section-2|domains=conclusion-sections">
             <a:extLst xmlns:a="http://schemas.openxmlformats.org/drawingml/2006/main">
               <a:ext uri="{FF2B5EF4-FFF2-40B4-BE49-F238E27FC236}">
-                <a16:creationId xmlns:a16="http://schemas.microsoft.com/office/drawing/2014/main" id="{BE8B9649-8243-4A0C-8F07-874BBA4E0559}"/>
+                <a16:creationId xmlns:a16="http://schemas.microsoft.com/office/drawing/2014/main" id="{A6C0D513-9859-4E5C-A5F4-2D240FF21680}"/>
               </a:ext>
             </a:extLst>
           </p:cNvPr>
@@ -1594,26 +1594,28 @@
         </p:nvSpPr>
         <p:spPr>
           <a:xfrm xmlns:a="http://schemas.openxmlformats.org/drawingml/2006/main">
-            <a:off x="647700" y="4641850"/>
-            <a:ext cx="10896600" cy="1473200"/>
+            <a:off x="647700" y="4629150"/>
+            <a:ext cx="10896600" cy="1485900"/>
           </a:xfrm>
           <a:prstGeom xmlns:a="http://schemas.openxmlformats.org/drawingml/2006/main" prst="roundRect">
             <a:avLst>
-              <a:gd name="adj" fmla="val 7759"/>
+              <a:gd name="adj" fmla="val 7692"/>
             </a:avLst>
           </a:prstGeom>
           <a:solidFill xmlns:a="http://schemas.openxmlformats.org/drawingml/2006/main">
-            <a:srgbClr val="E6F0F8"/>
-          </a:solidFill>
-          <a:ln xmlns:a="http://schemas.openxmlformats.org/drawingml/2006/main" w="0">
-            <a:noFill/>
+            <a:srgbClr val="F7E8DD"/>
+          </a:solidFill>
+          <a:ln xmlns:a="http://schemas.openxmlformats.org/drawingml/2006/main" w="9525">
+            <a:solidFill>
+              <a:srgbClr val="FFFFFF"/>
+            </a:solidFill>
             <a:prstDash val="solid"/>
           </a:ln>
         </p:spPr>
         <p:style>
           <a:lnRef xmlns:a="http://schemas.openxmlformats.org/drawingml/2006/main" idx="0"/>
           <a:fillRef xmlns:a="http://schemas.openxmlformats.org/drawingml/2006/main" idx="0"/>
-          <a:effectRef xmlns:a="http://schemas.openxmlformats.org/drawingml/2006/main" idx="4"/>
+          <a:effectRef xmlns:a="http://schemas.openxmlformats.org/drawingml/2006/main" idx="6"/>
           <a:fontRef xmlns:a="http://schemas.openxmlformats.org/drawingml/2006/main" idx="major"/>
         </p:style>
       </p:sp>
@@ -1622,7 +1624,7 @@
           <p:cNvPr id="10" name="">
             <a:extLst xmlns:a="http://schemas.openxmlformats.org/drawingml/2006/main">
               <a:ext uri="{FF2B5EF4-FFF2-40B4-BE49-F238E27FC236}">
-                <a16:creationId xmlns:a16="http://schemas.microsoft.com/office/drawing/2014/main" id="{D5D4EF69-FFE7-45C8-B54D-FA0F434E6461}"/>
+                <a16:creationId xmlns:a16="http://schemas.microsoft.com/office/drawing/2014/main" id="{35A96D89-4FD0-402A-ADBE-601B5080BB85}"/>
               </a:ext>
             </a:extLst>
           </p:cNvPr>
@@ -1633,13 +1635,11 @@
         </p:nvSpPr>
         <p:spPr>
           <a:xfrm xmlns:a="http://schemas.openxmlformats.org/drawingml/2006/main">
-            <a:off x="647700" y="4641850"/>
-            <a:ext cx="1809750" cy="1473200"/>
+            <a:off x="647700" y="4629150"/>
+            <a:ext cx="2000250" cy="1485900"/>
           </a:xfrm>
-          <a:prstGeom xmlns:a="http://schemas.openxmlformats.org/drawingml/2006/main" prst="roundRect">
-            <a:avLst>
-              <a:gd name="adj" fmla="val 7759"/>
-            </a:avLst>
+          <a:prstGeom xmlns:a="http://schemas.openxmlformats.org/drawingml/2006/main" prst="rightArrow">
+            <a:avLst/>
           </a:prstGeom>
           <a:solidFill xmlns:a="http://schemas.openxmlformats.org/drawingml/2006/main">
             <a:srgbClr val="D88952"/>
@@ -1650,7 +1650,7 @@
           </a:ln>
         </p:spPr>
         <p:txBody>
-          <a:bodyPr xmlns:a="http://schemas.openxmlformats.org/drawingml/2006/main" lIns="114300" tIns="76200" rIns="114300" bIns="76200" anchor="ctr">
+          <a:bodyPr xmlns:a="http://schemas.openxmlformats.org/drawingml/2006/main" lIns="114300" tIns="38100" rIns="266700" bIns="38100" anchor="ctr">
             <a:normAutofit fontScale="100000"/>
           </a:bodyPr>
           <a:lstStyle xmlns:a="http://schemas.openxmlformats.org/drawingml/2006/main"/>
@@ -1684,7 +1684,7 @@
           <p:cNvPr id="11" name="">
             <a:extLst xmlns:a="http://schemas.openxmlformats.org/drawingml/2006/main">
               <a:ext uri="{FF2B5EF4-FFF2-40B4-BE49-F238E27FC236}">
-                <a16:creationId xmlns:a16="http://schemas.microsoft.com/office/drawing/2014/main" id="{B8E16CCC-7987-468E-8AD7-668A84AFEA60}"/>
+                <a16:creationId xmlns:a16="http://schemas.microsoft.com/office/drawing/2014/main" id="{2CB813CC-D12F-4D75-A4A0-84A85787D13D}"/>
               </a:ext>
             </a:extLst>
           </p:cNvPr>
@@ -1695,8 +1695,8 @@
         </p:nvSpPr>
         <p:spPr>
           <a:xfrm xmlns:a="http://schemas.openxmlformats.org/drawingml/2006/main">
-            <a:off x="2724150" y="4775200"/>
-            <a:ext cx="8439150" cy="1206500"/>
+            <a:off x="2895600" y="4743450"/>
+            <a:ext cx="8210550" cy="1257300"/>
           </a:xfrm>
           <a:prstGeom xmlns:a="http://schemas.openxmlformats.org/drawingml/2006/main" prst="rect">
             <a:avLst/>
@@ -1708,7 +1708,7 @@
           </a:ln>
         </p:spPr>
         <p:txBody>
-          <a:bodyPr xmlns:a="http://schemas.openxmlformats.org/drawingml/2006/main" lIns="0" tIns="0" rIns="0" bIns="0" anchor="t">
+          <a:bodyPr xmlns:a="http://schemas.openxmlformats.org/drawingml/2006/main" lIns="0" tIns="0" rIns="0" bIns="0" anchor="ctr">
             <a:normAutofit fontScale="100000"/>
           </a:bodyPr>
           <a:lstStyle xmlns:a="http://schemas.openxmlformats.org/drawingml/2006/main"/>
@@ -1786,7 +1786,7 @@
     </p:spTree>
     <p:extLst>
       <p:ext uri="{BB962C8B-B14F-4D97-AF65-F5344CB8AC3E}">
-        <p14:creationId xmlns:p14="http://schemas.microsoft.com/office/powerpoint/2010/main" val="635801021"/>
+        <p14:creationId xmlns:p14="http://schemas.microsoft.com/office/powerpoint/2010/main" val="1527222463"/>
       </p:ext>
     </p:extLst>
   </p:cSld>
